--- a/Foundation_F1/Workshop/F1-W03_Apply_Workshop_L05-L06_Name_Badges_for_Our_Class.pptx
+++ b/Foundation_F1/Workshop/F1-W03_Apply_Workshop_L05-L06_Name_Badges_for_Our_Class.pptx
@@ -17690,6 +17690,19 @@
               <a:buNone/>
             </a:pPr>
             <a:r>
+              <a:rPr lang="en-US" sz="1150" b="1" dirty="0">
+                <a:solidFill>
+                  <a:srgbClr val="1B3B6F"/>
+                </a:solidFill>
+                <a:latin typeface="Calibri" pitchFamily="34" charset="0"/>
+                <a:cs typeface="Amiri" pitchFamily="2" charset="-78"/>
+              </a:rPr>
+              <a:t>‏</a:t>
+            </a:r>
+            <a:pPr algn="l" indent="0" marL="0">
+              <a:buNone/>
+            </a:pPr>
+            <a:r>
               <a:rPr lang="ar-SA" altLang="en-US" sz="1500" b="1" dirty="0">
                 <a:solidFill>
                   <a:srgbClr val="1B3B6F"/>
@@ -17711,7 +17724,7 @@
                 <a:latin typeface="Calibri" pitchFamily="34" charset="0"/>
                 <a:cs typeface="Amiri" pitchFamily="2" charset="-78"/>
               </a:rPr>
-              <a:t> are breakers: no joining line after them.</a:t>
+              <a:t>‏ are breakers: no joining line after them.</a:t>
             </a:r>
             <a:endParaRPr lang="en-US" sz="1150" dirty="0"/>
           </a:p>
@@ -23228,7 +23241,7 @@
                 <a:latin typeface="Calibri" pitchFamily="34" charset="0"/>
                 <a:cs typeface="Amiri" pitchFamily="2" charset="-78"/>
               </a:rPr>
-              <a:t>join letters correctly — and leave a gap after </a:t>
+              <a:t>join letters correctly — and leave a gap after ‏</a:t>
             </a:r>
             <a:pPr algn="l" indent="0" marL="0">
               <a:buNone/>
@@ -23255,7 +23268,7 @@
                 <a:latin typeface="Calibri" pitchFamily="34" charset="0"/>
                 <a:cs typeface="Amiri" pitchFamily="2" charset="-78"/>
               </a:rPr>
-              <a:t>?</a:t>
+              <a:t>‏?</a:t>
             </a:r>
             <a:endParaRPr lang="en-US" sz="1100" dirty="0"/>
           </a:p>
